--- a/edge_ai/pptx/M1-06_Axon_NPU.pptx
+++ b/edge_ai/pptx/M1-06_Axon_NPU.pptx
@@ -3293,7 +3293,7 @@
                 </a:solidFill>
                 <a:latin typeface="Segoe UI"/>
               </a:rPr>
-              <a:t>O Neuton resolve o que cabe na CPU. Voz não cabe: redes grandes, o tempo todo, com bateria de moeda. Este bloco abre a caixa do </a:t>
+              <a:t>O Neuton cobre os modelos que cabem na CPU. Redes de voz são maiores, rodam continuamente e precisam operar a bateria. Este bloco descreve o </a:t>
             </a:r>
             <a:r>
               <a:rPr sz="1600" b="1" i="0">
@@ -3311,7 +3311,7 @@
                 </a:solidFill>
                 <a:latin typeface="Segoe UI"/>
               </a:rPr>
-              <a:t> — o que ele é, como executa e o que isso custa.</a:t>
+              <a:t>: arquitetura, execução e custo.</a:t>
             </a:r>
           </a:p>
         </p:txBody>
@@ -3810,7 +3810,7 @@
                 </a:solidFill>
                 <a:latin typeface="Segoe UI"/>
               </a:rPr>
-              <a:t>A RAM é o ponto de encontro</a:t>
+              <a:t>A RAM interliga os quatro blocos</a:t>
             </a:r>
           </a:p>
         </p:txBody>
@@ -3980,7 +3980,7 @@
                 </a:solidFill>
                 <a:latin typeface="Segoe UI"/>
               </a:rPr>
-              <a:t>PDM → RAM → Axon → RAM → CPU: o diagrama mental que resolve quase toda dúvida de arquitetura deste bloco.</a:t>
+              <a:t>PDM → RAM → Axon → RAM → CPU: cada bloco acessa a RAM por DMA ou pela CPU; nenhum dado passa direto de um periférico a outro.</a:t>
             </a:r>
           </a:p>
         </p:txBody>
@@ -4888,7 +4888,7 @@
                 </a:solidFill>
                 <a:latin typeface="Segoe UI"/>
               </a:rPr>
-              <a:t>A frase da súmula em uma linha: </a:t>
+              <a:t>Fluxo da súmula: </a:t>
             </a:r>
             <a:r>
               <a:rPr sz="1400" b="1" i="0">
@@ -4906,7 +4906,7 @@
                 </a:solidFill>
                 <a:latin typeface="Segoe UI"/>
               </a:rPr>
-              <a:t>. Você não escreve nenhuma dessas ferramentas — só as configura.</a:t>
+              <a:t>. As ferramentas são do Lab e do NCS; a aplicação só as configura.</a:t>
             </a:r>
           </a:p>
         </p:txBody>
@@ -6769,7 +6769,7 @@
                 </a:solidFill>
                 <a:latin typeface="Segoe UI"/>
               </a:rPr>
-              <a:t> dispara — no lab de voz, isso acontece a cada </a:t>
+              <a:t> dispara — no lab de voz, isso se repete a cada </a:t>
             </a:r>
             <a:r>
               <a:rPr sz="1400" b="1" i="0">
@@ -6787,7 +6787,7 @@
                 </a:solidFill>
                 <a:latin typeface="Segoe UI"/>
               </a:rPr>
-              <a:t>, para sempre.</a:t>
+              <a:t>, continuamente.</a:t>
             </a:r>
           </a:p>
         </p:txBody>
@@ -7176,7 +7176,7 @@
                 </a:solidFill>
                 <a:latin typeface="Segoe UI"/>
               </a:rPr>
-              <a:t>features — o áudio vira imagem</a:t>
+              <a:t>features — mel-espectrograma</a:t>
             </a:r>
           </a:p>
         </p:txBody>
@@ -7215,7 +7215,7 @@
                 </a:solidFill>
                 <a:latin typeface="Segoe UI"/>
               </a:rPr>
-              <a:t>mel-espectrograma dentro da execução Axon (FFT/log acelerados na NPU)</a:t>
+              <a:t>calculado dentro da execução Axon (FFT/log acelerados na NPU)</a:t>
             </a:r>
           </a:p>
         </p:txBody>
@@ -8355,7 +8355,7 @@
                 </a:solidFill>
                 <a:latin typeface="Segoe UI"/>
               </a:rPr>
-              <a:t> e a engine confere na inicialização — dimensionamento é design, não tentativa e erro.</a:t>
+              <a:t> e a engine confere na inicialização — os tamanhos vêm do modelo compilado, não de ajuste empírico.</a:t>
             </a:r>
           </a:p>
         </p:txBody>
@@ -8711,7 +8711,7 @@
                 </a:solidFill>
                 <a:latin typeface="Segoe UI"/>
               </a:rPr>
-              <a:t> zeram na troca de estágio — sem isso um modelo “ouviria” o passado do outro.</a:t>
+              <a:t> zeram na troca de estágio — sem isso o contexto de um estágio contamina o outro.</a:t>
             </a:r>
           </a:p>
         </p:txBody>
@@ -8835,7 +8835,7 @@
                 </a:solidFill>
                 <a:latin typeface="Segoe UI"/>
               </a:rPr>
-              <a:t>Pequeno de propósito: a NPU trabalha em fluxo, trazendo pedaços de pesos e ativações por DMA. Consequência: </a:t>
+              <a:t>Dimensionado para trabalho em fluxo: pedaços de pesos e ativações chegam por DMA. Consequência: </a:t>
             </a:r>
             <a:r>
               <a:rPr sz="1200" b="1" i="0">
@@ -8844,7 +8844,7 @@
                 </a:solidFill>
                 <a:latin typeface="Segoe UI"/>
               </a:rPr>
-              <a:t>sem parede de memória</a:t>
+              <a:t>sem limite rígido de memória</a:t>
             </a:r>
             <a:r>
               <a:rPr sz="1200" b="0" i="0">
@@ -8853,7 +8853,7 @@
                 </a:solidFill>
                 <a:latin typeface="Segoe UI"/>
               </a:rPr>
-              <a:t> — o desempenho degrada suave, não despenca.</a:t>
+              <a:t> — a latência cresce com o modelo, sem descontinuidade.</a:t>
             </a:r>
           </a:p>
         </p:txBody>
@@ -9167,7 +9167,7 @@
                 </a:solidFill>
                 <a:latin typeface="Segoe UI"/>
               </a:rPr>
-              <a:t>A mesma solution do Lab nos dois backends — o que muda, o que não muda, e quem ganha quando.</a:t>
+              <a:t>A mesma solution do Lab nos dois backends — o que muda, o que não muda, e em que faixa de modelo cada um tem menor latência.</a:t>
             </a:r>
           </a:p>
         </p:txBody>
@@ -11656,7 +11656,7 @@
                 </a:solidFill>
                 <a:latin typeface="Segoe UI"/>
               </a:rPr>
-              <a:t> são 10–100× maiores que os de IMU — e rodam dezenas de vezes por segundo. É outro regime de computação.</a:t>
+              <a:t> são 10–100× maiores que os de IMU — e rodam dezenas de vezes por segundo: a carga de MACs por segundo é de outra ordem de grandeza.</a:t>
             </a:r>
           </a:p>
         </p:txBody>
@@ -12604,7 +12604,7 @@
                 </a:solidFill>
                 <a:latin typeface="Segoe UI"/>
               </a:rPr>
-              <a:t>Quem ganha quando — o resultado honesto</a:t>
+              <a:t>Neuton × Axon por tamanho de modelo</a:t>
             </a:r>
           </a:p>
         </p:txBody>
@@ -13885,7 +13885,7 @@
                 </a:solidFill>
                 <a:latin typeface="Segoe UI"/>
               </a:rPr>
-              <a:t>NPU não é “sempre mais rápido” — é “escala para modelos que a CPU não aguenta”.</a:t>
+              <a:t>A NPU tem custo fixo por job; a vantagem aparece quando as MACs do modelo dominam esse custo.</a:t>
             </a:r>
           </a:p>
         </p:txBody>
@@ -14116,7 +14116,7 @@
                 </a:solidFill>
                 <a:latin typeface="Segoe UI"/>
               </a:rPr>
-              <a:t>Dois modelos no mesmo microfone: o pequeno decide quando o grande merece acordar. É o padrão “Hey Siri”/“Alexa”.</a:t>
+              <a:t>Dois modelos no mesmo microfone: o pequeno roda sempre e habilita o grande por um intervalo. É o padrão “Hey Siri”/“Alexa”.</a:t>
             </a:r>
           </a:p>
         </p:txBody>
@@ -14557,7 +14557,7 @@
                 </a:solidFill>
                 <a:latin typeface="Segoe UI"/>
               </a:rPr>
-              <a:t>Mesma entrada (PCM 16 kHz em blocos de 10 ms), mesma engine — papéis opostos por </a:t>
+              <a:t>Mesma entrada (PCM 16 kHz em blocos de 10 ms), mesma engine — papéis complementares, definidos na </a:t>
             </a:r>
             <a:r>
               <a:rPr sz="1400" b="1" i="0">
@@ -14566,7 +14566,7 @@
                 </a:solidFill>
                 <a:latin typeface="Segoe UI"/>
               </a:rPr>
-              <a:t>design</a:t>
+              <a:t>arquitetura do app</a:t>
             </a:r>
             <a:r>
               <a:rPr sz="1400" b="0" i="0">
@@ -15269,7 +15269,7 @@
                 </a:solidFill>
                 <a:latin typeface="Segoe UI"/>
               </a:rPr>
-              <a:t>Por que cascata: a conta de energia decide</a:t>
+              <a:t>Por que cascata: o custo em corrente</a:t>
             </a:r>
           </a:p>
         </p:txBody>
@@ -15439,7 +15439,7 @@
                 </a:solidFill>
                 <a:latin typeface="Segoe UI"/>
               </a:rPr>
-              <a:t>Rodar o modelo grande o tempo todo dobraria o consumo </a:t>
+              <a:t>O modelo grande em execução contínua custaria 1.452 µA contra 837 µA </a:t>
             </a:r>
             <a:r>
               <a:rPr sz="1400" b="1" i="0">
@@ -15457,7 +15457,7 @@
                 </a:solidFill>
                 <a:latin typeface="Segoe UI"/>
               </a:rPr>
-              <a:t> os falsos positivos: o gatekeeper filtra os dois.</a:t>
+              <a:t> exporia 10 classes a falsos positivos; o gatekeeper limita os dois.</a:t>
             </a:r>
           </a:p>
         </p:txBody>
@@ -16679,7 +16679,7 @@
                 </a:solidFill>
                 <a:latin typeface="Segoe UI"/>
               </a:rPr>
-              <a:t>O achado que vale o slide: DS-CNN e wake word têm o </a:t>
+              <a:t>DS-CNN e wake word têm o </a:t>
             </a:r>
             <a:r>
               <a:rPr sz="1400" b="1" i="0">
@@ -16697,7 +16697,7 @@
                 </a:solidFill>
                 <a:latin typeface="Segoe UI"/>
               </a:rPr>
-              <a:t> e latências 2,3× diferentes — </a:t>
+              <a:t> em flash e latências 2,3× diferentes: </a:t>
             </a:r>
             <a:r>
               <a:rPr sz="1400" b="1" i="0">
@@ -16706,7 +16706,7 @@
                 </a:solidFill>
                 <a:latin typeface="Segoe UI"/>
               </a:rPr>
-              <a:t>a latência segue os MACs, não os bytes</a:t>
+              <a:t>a latência é função das MACs, não dos bytes</a:t>
             </a:r>
             <a:r>
               <a:rPr sz="1400" b="0" i="0">
@@ -17076,7 +17076,7 @@
                 </a:solidFill>
                 <a:latin typeface="Segoe UI"/>
               </a:rPr>
-              <a:t>arquitetura vira autonomia</a:t>
+              <a:t>o duty cycle da NPU define a autonomia</a:t>
             </a:r>
             <a:r>
               <a:rPr sz="1400" b="0" i="0">
@@ -17427,31 +17427,22 @@
               <a:buChar char="▪"/>
             </a:pPr>
             <a:r>
+              <a:rPr sz="1500" b="1">
+                <a:solidFill>
+                  <a:srgbClr val="E8F1F8"/>
+                </a:solidFill>
+                <a:latin typeface="Segoe UI"/>
+              </a:rPr>
+              <a:t>Periférico</a:t>
+            </a:r>
+            <a:r>
               <a:rPr sz="1500" b="0">
                 <a:solidFill>
                   <a:srgbClr val="93A6B8"/>
                 </a:solidFill>
                 <a:latin typeface="Segoe UI"/>
               </a:rPr>
-              <a:t>É um </a:t>
-            </a:r>
-            <a:r>
-              <a:rPr sz="1500" b="1">
-                <a:solidFill>
-                  <a:srgbClr val="E8F1F8"/>
-                </a:solidFill>
-                <a:latin typeface="Segoe UI"/>
-              </a:rPr>
-              <a:t>periférico</a:t>
-            </a:r>
-            <a:r>
-              <a:rPr sz="1500" b="0">
-                <a:solidFill>
-                  <a:srgbClr val="93A6B8"/>
-                </a:solidFill>
-                <a:latin typeface="Segoe UI"/>
-              </a:rPr>
-              <a:t>: processador próprio, mestre de barramento, executa redes </a:t>
+              <a:t> com processador próprio e DMA; executa redes </a:t>
             </a:r>
             <a:r>
               <a:rPr sz="1500" b="1">
@@ -17549,7 +17540,7 @@
                 </a:solidFill>
                 <a:latin typeface="Segoe UI"/>
               </a:rPr>
-              <a:t> entre CPU e NPU — e o benchmark diz quem ganha: pequeno na CPU, grande na NPU.</a:t>
+              <a:t> entre CPU e NPU; o benchmark define a escolha: modelo pequeno na CPU, grande na NPU.</a:t>
             </a:r>
           </a:p>
           <a:p>
@@ -17580,7 +17571,7 @@
                 </a:solidFill>
                 <a:latin typeface="Segoe UI"/>
               </a:rPr>
-              <a:t>arquitetura de energia</a:t>
+              <a:t>gestão de energia</a:t>
             </a:r>
             <a:r>
               <a:rPr sz="1500" b="0">
@@ -17589,7 +17580,7 @@
                 </a:solidFill>
                 <a:latin typeface="Segoe UI"/>
               </a:rPr>
-              <a:t>: o gatekeeper de 35 kB compra 11 dias de escuta numa CR2032.</a:t>
+              <a:t>: com o gatekeeper de 35 kB, ~11 dias de escuta numa CR2032.</a:t>
             </a:r>
           </a:p>
         </p:txBody>
@@ -17873,7 +17864,7 @@
                 </a:solidFill>
                 <a:latin typeface="Segoe UI"/>
               </a:rPr>
-              <a:t>MACs mandam, não bytes</a:t>
+              <a:t>MACs, não bytes</a:t>
             </a:r>
           </a:p>
         </p:txBody>
@@ -18196,7 +18187,7 @@
                 </a:solidFill>
                 <a:latin typeface="Segoe UI"/>
               </a:rPr>
-              <a:t>A NPU não acelera sempre — ela escala. E escala é o que a voz precisa.</a:t>
+              <a:t>A NPU tem custo fixo por job; a vantagem cresce com o tamanho do modelo — o regime dos modelos de voz.</a:t>
             </a:r>
           </a:p>
         </p:txBody>
@@ -18868,7 +18859,7 @@
                 </a:solidFill>
                 <a:latin typeface="Segoe UI"/>
               </a:rPr>
-              <a:t>A analogia que carrega o bloco inteiro: </a:t>
+              <a:t>Mesma categoria de bloco: </a:t>
             </a:r>
             <a:r>
               <a:rPr sz="1400" b="1" i="0">
@@ -18877,7 +18868,16 @@
                 </a:solidFill>
                 <a:latin typeface="Segoe UI"/>
               </a:rPr>
-              <a:t>UART transmite bytes; PDM decima áudio; Axon executa redes neurais.</a:t>
+              <a:t>UART transmite bytes; PDM decima áudio; Axon executa redes neurais</a:t>
+            </a:r>
+            <a:r>
+              <a:rPr sz="1400" b="0" i="0">
+                <a:solidFill>
+                  <a:srgbClr val="566577"/>
+                </a:solidFill>
+                <a:latin typeface="Segoe UI"/>
+              </a:rPr>
+              <a:t> — com registradores, DMA e interrupção.</a:t>
             </a:r>
           </a:p>
         </p:txBody>
@@ -19711,7 +19711,7 @@
                 </a:solidFill>
                 <a:latin typeface="Segoe UI"/>
               </a:rPr>
-              <a:t>Desliga sozinho entre jobs; feito para produto a bateria, não para datacenter.</a:t>
+              <a:t>Desliga entre jobs; consumo dimensionado para operação a bateria.</a:t>
             </a:r>
           </a:p>
         </p:txBody>
@@ -20617,7 +20617,7 @@
                 </a:solidFill>
                 <a:latin typeface="Segoe UI"/>
               </a:rPr>
-              <a:t>Regra prática: a NPU faz as MACs; a CPU decide o que elas significam.</a:t>
+              <a:t>Divisão de trabalho: a NPU executa as MACs; a CPU aplica a ativação final e interpreta a saída.</a:t>
             </a:r>
           </a:p>
         </p:txBody>
@@ -22856,7 +22856,7 @@
                 </a:solidFill>
                 <a:latin typeface="Segoe UI"/>
               </a:rPr>
-              <a:t>A cadeia inteira do lab de voz: som → PDM → RAM → NPU → decisão. A RAM é o ponto de encontro de tudo.</a:t>
+              <a:t>A cadeia inteira do lab de voz: som → PDM → RAM → NPU → decisão. Todos os blocos trocam dados pela RAM.</a:t>
             </a:r>
           </a:p>
         </p:txBody>
@@ -23127,7 +23127,7 @@
                 </a:solidFill>
                 <a:latin typeface="Segoe UI"/>
               </a:rPr>
-              <a:t>O caminho do áudio — ninguém copia nada na mão</a:t>
+              <a:t>O caminho do áudio: DMA nas duas pontas</a:t>
             </a:r>
           </a:p>
         </p:txBody>
@@ -23297,7 +23297,7 @@
                 </a:solidFill>
                 <a:latin typeface="Segoe UI"/>
               </a:rPr>
-              <a:t>Cada seta é hardware ou uma cópia deliberada — e </a:t>
+              <a:t>Cada seta é um transporte por hardware ou uma cópia explícita; </a:t>
             </a:r>
             <a:r>
               <a:rPr sz="1400" b="1" i="0">
@@ -23306,7 +23306,7 @@
                 </a:solidFill>
                 <a:latin typeface="Segoe UI"/>
               </a:rPr>
-              <a:t>cada cópia compra um desacoplamento</a:t>
+              <a:t>cada cópia desacopla</a:t>
             </a:r>
             <a:r>
               <a:rPr sz="1400" b="0" i="0">
@@ -23315,7 +23315,7 @@
                 </a:solidFill>
                 <a:latin typeface="Segoe UI"/>
               </a:rPr>
-              <a:t> entre o tempo real do PDM e o tempo da inferência.</a:t>
+              <a:t> o tempo real do PDM do tempo da inferência.</a:t>
             </a:r>
           </a:p>
         </p:txBody>
@@ -24606,7 +24606,7 @@
                 </a:solidFill>
                 <a:latin typeface="Segoe UI"/>
               </a:rPr>
-              <a:t>A cadeia de buffers — por que o Axon não lê o buffer do PDM</a:t>
+              <a:t>A cadeia de buffers: PDM → engine → NPU</a:t>
             </a:r>
           </a:p>
         </p:txBody>
@@ -24776,7 +24776,7 @@
                 </a:solidFill>
                 <a:latin typeface="Segoe UI"/>
               </a:rPr>
-              <a:t>O Axon </a:t>
+              <a:t>A NPU </a:t>
             </a:r>
             <a:r>
               <a:rPr sz="1400" b="1" i="0">
@@ -24785,7 +24785,7 @@
                 </a:solidFill>
                 <a:latin typeface="Segoe UI"/>
               </a:rPr>
-              <a:t>não come PCM</a:t>
+              <a:t>consome features, não PCM</a:t>
             </a:r>
             <a:r>
               <a:rPr sz="1400" b="0" i="0">
@@ -24794,7 +24794,7 @@
                 </a:solidFill>
                 <a:latin typeface="Segoe UI"/>
               </a:rPr>
-              <a:t> — come features. E o slab do PDM não pode esperar a inferência: as cópias desacoplam os dois relógios.</a:t>
+              <a:t>; e o slab do PDM não pode ficar retido até o fim da inferência — as cópias desacoplam os dois relógios.</a:t>
             </a:r>
           </a:p>
         </p:txBody>
@@ -24999,7 +24999,7 @@
                 </a:solidFill>
                 <a:latin typeface="Segoe UI"/>
               </a:rPr>
-              <a:t>o PDM precisa deles de volta JÁ — </a:t>
+              <a:t>o PDM precisa deles livres antes do próximo bloco — </a:t>
             </a:r>
             <a:r>
               <a:rPr sz="1250" b="0" i="0">
@@ -25454,7 +25454,7 @@
                 </a:solidFill>
                 <a:latin typeface="Segoe UI"/>
               </a:rPr>
-              <a:t>o áudio vira o 'retrato' tempo × frequência que redes de voz consomem</a:t>
+              <a:t>o PCM é convertido em uma matriz tempo × frequência, a entrada das redes de voz</a:t>
             </a:r>
           </a:p>
         </p:txBody>
